--- a/report.pptx
+++ b/report.pptx
@@ -13,6 +13,7 @@
     <p:sldId id="259" r:id="rId7"/>
     <p:sldId id="260" r:id="rId8"/>
     <p:sldId id="261" r:id="rId9"/>
+    <p:sldId id="271" r:id="rId10"/>
   </p:sldIdLst>
   <p:sldSz cx="12192000" cy="6858000"/>
   <p:notesSz cx="6858000" cy="9144000"/>
@@ -268,7 +269,7 @@
           <a:p>
             <a:fld id="{230D7F05-9E8C-4E8E-A118-09913917E885}" type="datetimeFigureOut">
               <a:rPr lang="zh-CN" altLang="en-US" smtClean="0"/>
-              <a:t>2026/2/15</a:t>
+              <a:t>2026/2/23</a:t>
             </a:fld>
             <a:endParaRPr lang="zh-CN" altLang="en-US"/>
           </a:p>
@@ -468,7 +469,7 @@
           <a:p>
             <a:fld id="{230D7F05-9E8C-4E8E-A118-09913917E885}" type="datetimeFigureOut">
               <a:rPr lang="zh-CN" altLang="en-US" smtClean="0"/>
-              <a:t>2026/2/15</a:t>
+              <a:t>2026/2/23</a:t>
             </a:fld>
             <a:endParaRPr lang="zh-CN" altLang="en-US"/>
           </a:p>
@@ -678,7 +679,7 @@
           <a:p>
             <a:fld id="{230D7F05-9E8C-4E8E-A118-09913917E885}" type="datetimeFigureOut">
               <a:rPr lang="zh-CN" altLang="en-US" smtClean="0"/>
-              <a:t>2026/2/15</a:t>
+              <a:t>2026/2/23</a:t>
             </a:fld>
             <a:endParaRPr lang="zh-CN" altLang="en-US"/>
           </a:p>
@@ -878,7 +879,7 @@
           <a:p>
             <a:fld id="{230D7F05-9E8C-4E8E-A118-09913917E885}" type="datetimeFigureOut">
               <a:rPr lang="zh-CN" altLang="en-US" smtClean="0"/>
-              <a:t>2026/2/15</a:t>
+              <a:t>2026/2/23</a:t>
             </a:fld>
             <a:endParaRPr lang="zh-CN" altLang="en-US"/>
           </a:p>
@@ -1154,7 +1155,7 @@
           <a:p>
             <a:fld id="{230D7F05-9E8C-4E8E-A118-09913917E885}" type="datetimeFigureOut">
               <a:rPr lang="zh-CN" altLang="en-US" smtClean="0"/>
-              <a:t>2026/2/15</a:t>
+              <a:t>2026/2/23</a:t>
             </a:fld>
             <a:endParaRPr lang="zh-CN" altLang="en-US"/>
           </a:p>
@@ -1422,7 +1423,7 @@
           <a:p>
             <a:fld id="{230D7F05-9E8C-4E8E-A118-09913917E885}" type="datetimeFigureOut">
               <a:rPr lang="zh-CN" altLang="en-US" smtClean="0"/>
-              <a:t>2026/2/15</a:t>
+              <a:t>2026/2/23</a:t>
             </a:fld>
             <a:endParaRPr lang="zh-CN" altLang="en-US"/>
           </a:p>
@@ -1837,7 +1838,7 @@
           <a:p>
             <a:fld id="{230D7F05-9E8C-4E8E-A118-09913917E885}" type="datetimeFigureOut">
               <a:rPr lang="zh-CN" altLang="en-US" smtClean="0"/>
-              <a:t>2026/2/15</a:t>
+              <a:t>2026/2/23</a:t>
             </a:fld>
             <a:endParaRPr lang="zh-CN" altLang="en-US"/>
           </a:p>
@@ -1979,7 +1980,7 @@
           <a:p>
             <a:fld id="{230D7F05-9E8C-4E8E-A118-09913917E885}" type="datetimeFigureOut">
               <a:rPr lang="zh-CN" altLang="en-US" smtClean="0"/>
-              <a:t>2026/2/15</a:t>
+              <a:t>2026/2/23</a:t>
             </a:fld>
             <a:endParaRPr lang="zh-CN" altLang="en-US"/>
           </a:p>
@@ -2092,7 +2093,7 @@
           <a:p>
             <a:fld id="{230D7F05-9E8C-4E8E-A118-09913917E885}" type="datetimeFigureOut">
               <a:rPr lang="zh-CN" altLang="en-US" smtClean="0"/>
-              <a:t>2026/2/15</a:t>
+              <a:t>2026/2/23</a:t>
             </a:fld>
             <a:endParaRPr lang="zh-CN" altLang="en-US"/>
           </a:p>
@@ -2405,7 +2406,7 @@
           <a:p>
             <a:fld id="{230D7F05-9E8C-4E8E-A118-09913917E885}" type="datetimeFigureOut">
               <a:rPr lang="zh-CN" altLang="en-US" smtClean="0"/>
-              <a:t>2026/2/15</a:t>
+              <a:t>2026/2/23</a:t>
             </a:fld>
             <a:endParaRPr lang="zh-CN" altLang="en-US"/>
           </a:p>
@@ -2694,7 +2695,7 @@
           <a:p>
             <a:fld id="{230D7F05-9E8C-4E8E-A118-09913917E885}" type="datetimeFigureOut">
               <a:rPr lang="zh-CN" altLang="en-US" smtClean="0"/>
-              <a:t>2026/2/15</a:t>
+              <a:t>2026/2/23</a:t>
             </a:fld>
             <a:endParaRPr lang="zh-CN" altLang="en-US"/>
           </a:p>
@@ -2937,7 +2938,7 @@
           <a:p>
             <a:fld id="{230D7F05-9E8C-4E8E-A118-09913917E885}" type="datetimeFigureOut">
               <a:rPr lang="zh-CN" altLang="en-US" smtClean="0"/>
-              <a:t>2026/2/15</a:t>
+              <a:t>2026/2/23</a:t>
             </a:fld>
             <a:endParaRPr lang="zh-CN" altLang="en-US"/>
           </a:p>
@@ -7367,8 +7368,8 @@
           </a:prstGeom>
         </p:spPr>
       </p:pic>
-      <mc:AlternateContent xmlns:mc="http://schemas.openxmlformats.org/markup-compatibility/2006">
-        <mc:Choice xmlns:a14="http://schemas.microsoft.com/office/drawing/2010/main" Requires="a14">
+      <mc:AlternateContent xmlns:mc="http://schemas.openxmlformats.org/markup-compatibility/2006" xmlns:a14="http://schemas.microsoft.com/office/drawing/2010/main">
+        <mc:Choice Requires="a14">
           <p:sp>
             <p:nvSpPr>
               <p:cNvPr id="6" name="TextBox 5">
@@ -7445,7 +7446,7 @@
             </p:txBody>
           </p:sp>
         </mc:Choice>
-        <mc:Fallback>
+        <mc:Fallback xmlns="">
           <p:sp>
             <p:nvSpPr>
               <p:cNvPr id="6" name="TextBox 5">
@@ -7647,8 +7648,8 @@
           </a:p>
         </p:txBody>
       </p:sp>
-      <mc:AlternateContent xmlns:mc="http://schemas.openxmlformats.org/markup-compatibility/2006">
-        <mc:Choice xmlns:a14="http://schemas.microsoft.com/office/drawing/2010/main" Requires="a14">
+      <mc:AlternateContent xmlns:mc="http://schemas.openxmlformats.org/markup-compatibility/2006" xmlns:a14="http://schemas.microsoft.com/office/drawing/2010/main">
+        <mc:Choice Requires="a14">
           <p:sp>
             <p:nvSpPr>
               <p:cNvPr id="17" name="TextBox 16">
@@ -7736,7 +7737,7 @@
             </p:txBody>
           </p:sp>
         </mc:Choice>
-        <mc:Fallback>
+        <mc:Fallback xmlns="">
           <p:sp>
             <p:nvSpPr>
               <p:cNvPr id="17" name="TextBox 16">
@@ -8724,8 +8725,8 @@
           </a:p>
         </p:txBody>
       </p:sp>
-      <mc:AlternateContent xmlns:mc="http://schemas.openxmlformats.org/markup-compatibility/2006">
-        <mc:Choice xmlns:a14="http://schemas.microsoft.com/office/drawing/2010/main" Requires="a14">
+      <mc:AlternateContent xmlns:mc="http://schemas.openxmlformats.org/markup-compatibility/2006" xmlns:a14="http://schemas.microsoft.com/office/drawing/2010/main">
+        <mc:Choice Requires="a14">
           <p:sp>
             <p:nvSpPr>
               <p:cNvPr id="17" name="TextBox 16">
@@ -8813,7 +8814,7 @@
             </p:txBody>
           </p:sp>
         </mc:Choice>
-        <mc:Fallback>
+        <mc:Fallback xmlns="">
           <p:sp>
             <p:nvSpPr>
               <p:cNvPr id="17" name="TextBox 16">
@@ -11926,6 +11927,206 @@
     <p:extLst>
       <p:ext uri="{BB962C8B-B14F-4D97-AF65-F5344CB8AC3E}">
         <p14:creationId xmlns:p14="http://schemas.microsoft.com/office/powerpoint/2010/main" val="2412101343"/>
+      </p:ext>
+    </p:extLst>
+  </p:cSld>
+  <p:clrMapOvr>
+    <a:masterClrMapping/>
+  </p:clrMapOvr>
+</p:sld>
+</file>
+
+<file path=ppt/slides/slide9.xml><?xml version="1.0" encoding="utf-8"?>
+<p:sld xmlns:a="http://schemas.openxmlformats.org/drawingml/2006/main" xmlns:r="http://schemas.openxmlformats.org/officeDocument/2006/relationships" xmlns:p="http://schemas.openxmlformats.org/presentationml/2006/main">
+  <p:cSld>
+    <p:spTree>
+      <p:nvGrpSpPr>
+        <p:cNvPr id="1" name=""/>
+        <p:cNvGrpSpPr/>
+        <p:nvPr/>
+      </p:nvGrpSpPr>
+      <p:grpSpPr>
+        <a:xfrm>
+          <a:off x="0" y="0"/>
+          <a:ext cx="0" cy="0"/>
+          <a:chOff x="0" y="0"/>
+          <a:chExt cx="0" cy="0"/>
+        </a:xfrm>
+      </p:grpSpPr>
+      <p:sp>
+        <p:nvSpPr>
+          <p:cNvPr id="2" name="Title 1">
+            <a:extLst>
+              <a:ext uri="{FF2B5EF4-FFF2-40B4-BE49-F238E27FC236}">
+                <a16:creationId xmlns:a16="http://schemas.microsoft.com/office/drawing/2014/main" id="{4D0F8DCE-F0EC-1764-CD96-0C51343F8F51}"/>
+              </a:ext>
+            </a:extLst>
+          </p:cNvPr>
+          <p:cNvSpPr>
+            <a:spLocks noGrp="1"/>
+          </p:cNvSpPr>
+          <p:nvPr>
+            <p:ph type="title"/>
+          </p:nvPr>
+        </p:nvSpPr>
+        <p:spPr/>
+        <p:txBody>
+          <a:bodyPr/>
+          <a:lstStyle/>
+          <a:p>
+            <a:endParaRPr lang="zh-CN" altLang="en-US"/>
+          </a:p>
+        </p:txBody>
+      </p:sp>
+      <p:sp>
+        <p:nvSpPr>
+          <p:cNvPr id="3" name="Content Placeholder 2">
+            <a:extLst>
+              <a:ext uri="{FF2B5EF4-FFF2-40B4-BE49-F238E27FC236}">
+                <a16:creationId xmlns:a16="http://schemas.microsoft.com/office/drawing/2014/main" id="{14B7FA7A-89D3-D326-5EFF-BE6E40CA26AE}"/>
+              </a:ext>
+            </a:extLst>
+          </p:cNvPr>
+          <p:cNvSpPr>
+            <a:spLocks noGrp="1"/>
+          </p:cNvSpPr>
+          <p:nvPr>
+            <p:ph idx="1"/>
+          </p:nvPr>
+        </p:nvSpPr>
+        <p:spPr/>
+        <p:txBody>
+          <a:bodyPr/>
+          <a:lstStyle/>
+          <a:p>
+            <a:endParaRPr lang="zh-CN" altLang="en-US"/>
+          </a:p>
+        </p:txBody>
+      </p:sp>
+      <p:pic>
+        <p:nvPicPr>
+          <p:cNvPr id="5" name="Picture 4">
+            <a:extLst>
+              <a:ext uri="{FF2B5EF4-FFF2-40B4-BE49-F238E27FC236}">
+                <a16:creationId xmlns:a16="http://schemas.microsoft.com/office/drawing/2014/main" id="{8F2481A8-04CD-C572-D58B-2E6B730E11C6}"/>
+              </a:ext>
+            </a:extLst>
+          </p:cNvPr>
+          <p:cNvPicPr>
+            <a:picLocks noChangeAspect="1"/>
+          </p:cNvPicPr>
+          <p:nvPr/>
+        </p:nvPicPr>
+        <p:blipFill>
+          <a:blip r:embed="rId2"/>
+          <a:stretch>
+            <a:fillRect/>
+          </a:stretch>
+        </p:blipFill>
+        <p:spPr>
+          <a:xfrm>
+            <a:off x="1157688" y="3426883"/>
+            <a:ext cx="4726417" cy="2809010"/>
+          </a:xfrm>
+          <a:prstGeom prst="rect">
+            <a:avLst/>
+          </a:prstGeom>
+        </p:spPr>
+      </p:pic>
+      <p:pic>
+        <p:nvPicPr>
+          <p:cNvPr id="6" name="Picture 5">
+            <a:extLst>
+              <a:ext uri="{FF2B5EF4-FFF2-40B4-BE49-F238E27FC236}">
+                <a16:creationId xmlns:a16="http://schemas.microsoft.com/office/drawing/2014/main" id="{1FD85BC4-BD8A-BD32-06D9-DFC41EF2EC6D}"/>
+              </a:ext>
+            </a:extLst>
+          </p:cNvPr>
+          <p:cNvPicPr>
+            <a:picLocks noChangeAspect="1"/>
+          </p:cNvPicPr>
+          <p:nvPr/>
+        </p:nvPicPr>
+        <p:blipFill>
+          <a:blip r:embed="rId3"/>
+          <a:stretch>
+            <a:fillRect/>
+          </a:stretch>
+        </p:blipFill>
+        <p:spPr>
+          <a:xfrm>
+            <a:off x="6096000" y="286183"/>
+            <a:ext cx="4726417" cy="2809010"/>
+          </a:xfrm>
+          <a:prstGeom prst="rect">
+            <a:avLst/>
+          </a:prstGeom>
+        </p:spPr>
+      </p:pic>
+      <p:pic>
+        <p:nvPicPr>
+          <p:cNvPr id="7" name="Picture 6">
+            <a:extLst>
+              <a:ext uri="{FF2B5EF4-FFF2-40B4-BE49-F238E27FC236}">
+                <a16:creationId xmlns:a16="http://schemas.microsoft.com/office/drawing/2014/main" id="{301D8B4D-0062-1EBB-FCDE-D7B1133E4F86}"/>
+              </a:ext>
+            </a:extLst>
+          </p:cNvPr>
+          <p:cNvPicPr>
+            <a:picLocks noChangeAspect="1"/>
+          </p:cNvPicPr>
+          <p:nvPr/>
+        </p:nvPicPr>
+        <p:blipFill>
+          <a:blip r:embed="rId4"/>
+          <a:stretch>
+            <a:fillRect/>
+          </a:stretch>
+        </p:blipFill>
+        <p:spPr>
+          <a:xfrm>
+            <a:off x="6096000" y="3426883"/>
+            <a:ext cx="4726417" cy="2809010"/>
+          </a:xfrm>
+          <a:prstGeom prst="rect">
+            <a:avLst/>
+          </a:prstGeom>
+        </p:spPr>
+      </p:pic>
+      <p:pic>
+        <p:nvPicPr>
+          <p:cNvPr id="8" name="Picture 7">
+            <a:extLst>
+              <a:ext uri="{FF2B5EF4-FFF2-40B4-BE49-F238E27FC236}">
+                <a16:creationId xmlns:a16="http://schemas.microsoft.com/office/drawing/2014/main" id="{6666B338-07E6-25B8-2ABD-FBF0072D956A}"/>
+              </a:ext>
+            </a:extLst>
+          </p:cNvPr>
+          <p:cNvPicPr>
+            <a:picLocks noChangeAspect="1"/>
+          </p:cNvPicPr>
+          <p:nvPr/>
+        </p:nvPicPr>
+        <p:blipFill>
+          <a:blip r:embed="rId5"/>
+          <a:stretch>
+            <a:fillRect/>
+          </a:stretch>
+        </p:blipFill>
+        <p:spPr>
+          <a:xfrm>
+            <a:off x="1199148" y="286183"/>
+            <a:ext cx="4726417" cy="2809011"/>
+          </a:xfrm>
+          <a:prstGeom prst="rect">
+            <a:avLst/>
+          </a:prstGeom>
+        </p:spPr>
+      </p:pic>
+    </p:spTree>
+    <p:extLst>
+      <p:ext uri="{BB962C8B-B14F-4D97-AF65-F5344CB8AC3E}">
+        <p14:creationId xmlns:p14="http://schemas.microsoft.com/office/powerpoint/2010/main" val="3755203042"/>
       </p:ext>
     </p:extLst>
   </p:cSld>

--- a/report.pptx
+++ b/report.pptx
@@ -14,6 +14,7 @@
     <p:sldId id="260" r:id="rId8"/>
     <p:sldId id="261" r:id="rId9"/>
     <p:sldId id="271" r:id="rId10"/>
+    <p:sldId id="272" r:id="rId11"/>
   </p:sldIdLst>
   <p:sldSz cx="12192000" cy="6858000"/>
   <p:notesSz cx="6858000" cy="9144000"/>
@@ -4448,6 +4449,146 @@
 </p:sld>
 </file>
 
+<file path=ppt/slides/slide10.xml><?xml version="1.0" encoding="utf-8"?>
+<p:sld xmlns:a="http://schemas.openxmlformats.org/drawingml/2006/main" xmlns:r="http://schemas.openxmlformats.org/officeDocument/2006/relationships" xmlns:p="http://schemas.openxmlformats.org/presentationml/2006/main">
+  <p:cSld>
+    <p:spTree>
+      <p:nvGrpSpPr>
+        <p:cNvPr id="1" name=""/>
+        <p:cNvGrpSpPr/>
+        <p:nvPr/>
+      </p:nvGrpSpPr>
+      <p:grpSpPr>
+        <a:xfrm>
+          <a:off x="0" y="0"/>
+          <a:ext cx="0" cy="0"/>
+          <a:chOff x="0" y="0"/>
+          <a:chExt cx="0" cy="0"/>
+        </a:xfrm>
+      </p:grpSpPr>
+      <p:sp>
+        <p:nvSpPr>
+          <p:cNvPr id="2" name="Title 1">
+            <a:extLst>
+              <a:ext uri="{FF2B5EF4-FFF2-40B4-BE49-F238E27FC236}">
+                <a16:creationId xmlns:a16="http://schemas.microsoft.com/office/drawing/2014/main" id="{8019E3DA-F5CD-FBB2-322A-FFBD997E916E}"/>
+              </a:ext>
+            </a:extLst>
+          </p:cNvPr>
+          <p:cNvSpPr>
+            <a:spLocks noGrp="1"/>
+          </p:cNvSpPr>
+          <p:nvPr>
+            <p:ph type="title"/>
+          </p:nvPr>
+        </p:nvSpPr>
+        <p:spPr/>
+        <p:txBody>
+          <a:bodyPr/>
+          <a:lstStyle/>
+          <a:p>
+            <a:endParaRPr lang="zh-CN" altLang="en-US"/>
+          </a:p>
+        </p:txBody>
+      </p:sp>
+      <p:sp>
+        <p:nvSpPr>
+          <p:cNvPr id="3" name="Content Placeholder 2">
+            <a:extLst>
+              <a:ext uri="{FF2B5EF4-FFF2-40B4-BE49-F238E27FC236}">
+                <a16:creationId xmlns:a16="http://schemas.microsoft.com/office/drawing/2014/main" id="{910C82BA-4D3C-C7B9-93CC-9570CC9E0E3F}"/>
+              </a:ext>
+            </a:extLst>
+          </p:cNvPr>
+          <p:cNvSpPr>
+            <a:spLocks noGrp="1"/>
+          </p:cNvSpPr>
+          <p:nvPr>
+            <p:ph idx="1"/>
+          </p:nvPr>
+        </p:nvSpPr>
+        <p:spPr/>
+        <p:txBody>
+          <a:bodyPr/>
+          <a:lstStyle/>
+          <a:p>
+            <a:endParaRPr lang="zh-CN" altLang="en-US" dirty="0"/>
+          </a:p>
+        </p:txBody>
+      </p:sp>
+      <p:pic>
+        <p:nvPicPr>
+          <p:cNvPr id="4" name="Picture 3">
+            <a:extLst>
+              <a:ext uri="{FF2B5EF4-FFF2-40B4-BE49-F238E27FC236}">
+                <a16:creationId xmlns:a16="http://schemas.microsoft.com/office/drawing/2014/main" id="{DB037392-6139-370A-13C5-87B4F10418E2}"/>
+              </a:ext>
+            </a:extLst>
+          </p:cNvPr>
+          <p:cNvPicPr>
+            <a:picLocks noChangeAspect="1"/>
+          </p:cNvPicPr>
+          <p:nvPr/>
+        </p:nvPicPr>
+        <p:blipFill>
+          <a:blip r:embed="rId2"/>
+          <a:stretch>
+            <a:fillRect/>
+          </a:stretch>
+        </p:blipFill>
+        <p:spPr>
+          <a:xfrm>
+            <a:off x="3467100" y="3286123"/>
+            <a:ext cx="5257800" cy="2473967"/>
+          </a:xfrm>
+          <a:prstGeom prst="rect">
+            <a:avLst/>
+          </a:prstGeom>
+        </p:spPr>
+      </p:pic>
+      <p:pic>
+        <p:nvPicPr>
+          <p:cNvPr id="5" name="Picture 4">
+            <a:extLst>
+              <a:ext uri="{FF2B5EF4-FFF2-40B4-BE49-F238E27FC236}">
+                <a16:creationId xmlns:a16="http://schemas.microsoft.com/office/drawing/2014/main" id="{02762D01-04AE-B68E-1F3A-C53CE8E668EF}"/>
+              </a:ext>
+            </a:extLst>
+          </p:cNvPr>
+          <p:cNvPicPr>
+            <a:picLocks noChangeAspect="1"/>
+          </p:cNvPicPr>
+          <p:nvPr/>
+        </p:nvPicPr>
+        <p:blipFill>
+          <a:blip r:embed="rId3"/>
+          <a:stretch>
+            <a:fillRect/>
+          </a:stretch>
+        </p:blipFill>
+        <p:spPr>
+          <a:xfrm>
+            <a:off x="3467100" y="588641"/>
+            <a:ext cx="5257800" cy="2473967"/>
+          </a:xfrm>
+          <a:prstGeom prst="rect">
+            <a:avLst/>
+          </a:prstGeom>
+        </p:spPr>
+      </p:pic>
+    </p:spTree>
+    <p:extLst>
+      <p:ext uri="{BB962C8B-B14F-4D97-AF65-F5344CB8AC3E}">
+        <p14:creationId xmlns:p14="http://schemas.microsoft.com/office/powerpoint/2010/main" val="3758614199"/>
+      </p:ext>
+    </p:extLst>
+  </p:cSld>
+  <p:clrMapOvr>
+    <a:masterClrMapping/>
+  </p:clrMapOvr>
+</p:sld>
+</file>
+
 <file path=ppt/slides/slide2.xml><?xml version="1.0" encoding="utf-8"?>
 <p:sld xmlns:a="http://schemas.openxmlformats.org/drawingml/2006/main" xmlns:r="http://schemas.openxmlformats.org/officeDocument/2006/relationships" xmlns:p="http://schemas.openxmlformats.org/presentationml/2006/main">
   <p:cSld>
